--- a/document/分布式查询引擎模块汇报PPT-郭子安.pptx
+++ b/document/分布式查询引擎模块汇报PPT-郭子安.pptx
@@ -119,7 +119,7 @@
   <p:extLst>
     <p:ext uri="{EFAFB233-063F-42B5-8137-9DF3F51BA10A}">
       <p15:sldGuideLst xmlns:p15="http://schemas.microsoft.com/office/powerpoint/2012/main">
-        <p15:guide id="1" orient="horz" pos="2160" userDrawn="1">
+        <p15:guide id="1" orient="horz" pos="2146" userDrawn="1">
           <p15:clr>
             <a:srgbClr val="A4A3A4"/>
           </p15:clr>
@@ -6533,7 +6533,7 @@
         <p:spPr>
           <a:xfrm>
             <a:off x="1005839" y="5824728"/>
-            <a:ext cx="10332719" cy="164592"/>
+            <a:ext cx="10332719" cy="252730"/>
           </a:xfrm>
           <a:prstGeom prst="rect">
             <a:avLst/>
@@ -6553,7 +6553,7 @@
                 </a:solidFill>
                 <a:latin typeface="Consolas"/>
               </a:rPr>
-              <a:t>最新验证：./scripts/mvn17.sh -q test  通过；RPC 测试已改为动态端口并主动释放服务端资源。</a:t>
+              <a:t>./scripts/mvn17.sh -q test  通过</a:t>
             </a:r>
             <a:endParaRPr sz="1050">
               <a:solidFill>
